--- a/videos/machine-learning/03_ridger_regression_gradient_descent/recreated_pptx/slide_012_recreated.pptx
+++ b/videos/machine-learning/03_ridger_regression_gradient_descent/recreated_pptx/slide_012_recreated.pptx
@@ -884,7 +884,7 @@
         <p:spPr>
           <a:xfrm>
             <a:off x="685800" y="571500"/>
-            <a:ext cx="10795000" cy="6286500"/>
+            <a:ext cx="10782300" cy="6286500"/>
           </a:xfrm>
           <a:prstGeom prst="rect">
             <a:avLst/>
@@ -903,19 +903,16 @@
         </p:nvSpPr>
         <p:spPr>
           <a:xfrm>
-            <a:off x="742950" y="584200"/>
-            <a:ext cx="0" cy="6261100"/>
+            <a:off x="742950" y="571500"/>
+            <a:ext cx="12700" cy="6286500"/>
           </a:xfrm>
-          <a:prstGeom prst="line">
+          <a:prstGeom prst="rect">
             <a:avLst/>
           </a:prstGeom>
-          <a:noFill/>
-          <a:ln w="12700">
-            <a:solidFill>
-              <a:srgbClr val="C00000"/>
-            </a:solidFill>
-            <a:prstDash val="solid"/>
-          </a:ln>
+          <a:solidFill>
+            <a:srgbClr val="C00000"/>
+          </a:solidFill>
+          <a:ln/>
         </p:spPr>
       </p:sp>
       <p:sp>
@@ -926,19 +923,16 @@
         </p:nvSpPr>
         <p:spPr>
           <a:xfrm>
-            <a:off x="11442700" y="584200"/>
-            <a:ext cx="0" cy="6261100"/>
+            <a:off x="11442700" y="571500"/>
+            <a:ext cx="12700" cy="6286500"/>
           </a:xfrm>
-          <a:prstGeom prst="line">
+          <a:prstGeom prst="rect">
             <a:avLst/>
           </a:prstGeom>
-          <a:noFill/>
-          <a:ln w="12700">
-            <a:solidFill>
-              <a:srgbClr val="C00000"/>
-            </a:solidFill>
-            <a:prstDash val="solid"/>
-          </a:ln>
+          <a:solidFill>
+            <a:srgbClr val="C00000"/>
+          </a:solidFill>
+          <a:ln/>
         </p:spPr>
       </p:sp>
       <p:sp>
@@ -949,19 +943,16 @@
         </p:nvSpPr>
         <p:spPr>
           <a:xfrm>
-            <a:off x="736600" y="6838950"/>
-            <a:ext cx="10718800" cy="0"/>
+            <a:off x="685800" y="6838950"/>
+            <a:ext cx="10782300" cy="12700"/>
           </a:xfrm>
-          <a:prstGeom prst="line">
+          <a:prstGeom prst="rect">
             <a:avLst/>
           </a:prstGeom>
-          <a:noFill/>
-          <a:ln w="12700">
-            <a:solidFill>
-              <a:srgbClr val="C00000"/>
-            </a:solidFill>
-            <a:prstDash val="solid"/>
-          </a:ln>
+          <a:solidFill>
+            <a:srgbClr val="C00000"/>
+          </a:solidFill>
+          <a:ln/>
         </p:spPr>
       </p:sp>
       <p:sp>
@@ -981,7 +972,7 @@
           <a:solidFill>
             <a:srgbClr val="FDFD96"/>
           </a:solidFill>
-          <a:ln w="25400">
+          <a:ln w="12700">
             <a:solidFill>
               <a:srgbClr val="6A5ACD"/>
             </a:solidFill>
@@ -3919,8 +3910,8 @@
           </p:nvPr>
         </p:nvGraphicFramePr>
         <p:xfrm>
-          <a:off x="9131300" y="1625600"/>
-          <a:ext cx="1955800" cy="1574800"/>
+          <a:off x="8496300" y="1625600"/>
+          <a:ext cx="2590800" cy="1574800"/>
         </p:xfrm>
         <a:graphic>
           <a:graphicData uri="http://schemas.openxmlformats.org/drawingml/2006/table">
@@ -3928,6 +3919,7 @@
               <a:tblPr/>
               <a:tblGrid>
                 <a:gridCol w="635000"/>
+                <a:gridCol w="635000"/>
                 <a:gridCol w="647700"/>
                 <a:gridCol w="673100"/>
               </a:tblGrid>
@@ -3940,6 +3932,63 @@
                       <a:pPr indent="0" marL="0">
                         <a:buNone/>
                       </a:pPr>
+                      <a:endParaRPr lang="en-US" sz="1100" dirty="0">
+                        <a:latin typeface="Arial" charset="0"/>
+                        <a:ea typeface="Arial" charset="0"/>
+                        <a:cs typeface="Arial" charset="0"/>
+                      </a:endParaRPr>
+                    </a:p>
+                  </a:txBody>
+                  <a:tcPr marL="91440" marR="91440" marT="45720" marB="45720">
+                    <a:lnL w="12700" cap="flat" cmpd="sng" algn="ctr">
+                      <a:solidFill>
+                        <a:srgbClr val="000000"/>
+                      </a:solidFill>
+                      <a:prstDash val="solid"/>
+                      <a:round/>
+                      <a:headEnd type="none" w="med" len="med"/>
+                      <a:tailEnd type="none" w="med" len="med"/>
+                    </a:lnL>
+                    <a:lnR w="12700" cap="flat" cmpd="sng" algn="ctr">
+                      <a:solidFill>
+                        <a:srgbClr val="000000"/>
+                      </a:solidFill>
+                      <a:prstDash val="solid"/>
+                      <a:round/>
+                      <a:headEnd type="none" w="med" len="med"/>
+                      <a:tailEnd type="none" w="med" len="med"/>
+                    </a:lnR>
+                    <a:lnT w="12700" cap="flat" cmpd="sng" algn="ctr">
+                      <a:solidFill>
+                        <a:srgbClr val="000000"/>
+                      </a:solidFill>
+                      <a:prstDash val="solid"/>
+                      <a:round/>
+                      <a:headEnd type="none" w="med" len="med"/>
+                      <a:tailEnd type="none" w="med" len="med"/>
+                    </a:lnT>
+                    <a:lnB w="12700" cap="flat" cmpd="sng" algn="ctr">
+                      <a:solidFill>
+                        <a:srgbClr val="000000"/>
+                      </a:solidFill>
+                      <a:prstDash val="solid"/>
+                      <a:round/>
+                      <a:headEnd type="none" w="med" len="med"/>
+                      <a:tailEnd type="none" w="med" len="med"/>
+                    </a:lnB>
+                    <a:solidFill>
+                      <a:srgbClr val="FFFFFF"/>
+                    </a:solidFill>
+                  </a:tcPr>
+                </a:tc>
+                <a:tc>
+                  <a:txBody>
+                    <a:bodyPr/>
+                    <a:lstStyle/>
+                    <a:p>
+                      <a:pPr indent="0" marL="0">
+                        <a:buNone/>
+                      </a:pPr>
                       <a:r>
                         <a:rPr lang="en-US" sz="1100" b="1" dirty="0">
                           <a:solidFill>
@@ -4143,6 +4192,74 @@
                     <a:bodyPr/>
                     <a:lstStyle/>
                     <a:p>
+                      <a:pPr algn="l" indent="0" marL="0">
+                        <a:buNone/>
+                      </a:pPr>
+                      <a:r>
+                        <a:rPr lang="en-US" sz="1100" dirty="0">
+                          <a:solidFill>
+                            <a:srgbClr val="000000"/>
+                          </a:solidFill>
+                          <a:latin typeface="Arial" pitchFamily="34" charset="0"/>
+                          <a:ea typeface="Arial" pitchFamily="34" charset="-122"/>
+                          <a:cs typeface="Arial" pitchFamily="34" charset="-120"/>
+                        </a:rPr>
+                        <a:t>X1</a:t>
+                      </a:r>
+                      <a:endParaRPr lang="en-US" sz="1100" dirty="0">
+                        <a:latin typeface="Arial" charset="0"/>
+                        <a:ea typeface="Arial" charset="0"/>
+                        <a:cs typeface="Arial" charset="0"/>
+                      </a:endParaRPr>
+                    </a:p>
+                  </a:txBody>
+                  <a:tcPr marL="91440" marR="91440" marT="45720" marB="45720" anchor="ctr">
+                    <a:lnL w="12700" cap="flat" cmpd="sng" algn="ctr">
+                      <a:solidFill>
+                        <a:srgbClr val="000000"/>
+                      </a:solidFill>
+                      <a:prstDash val="solid"/>
+                      <a:round/>
+                      <a:headEnd type="none" w="med" len="med"/>
+                      <a:tailEnd type="none" w="med" len="med"/>
+                    </a:lnL>
+                    <a:lnR w="12700" cap="flat" cmpd="sng" algn="ctr">
+                      <a:solidFill>
+                        <a:srgbClr val="000000"/>
+                      </a:solidFill>
+                      <a:prstDash val="solid"/>
+                      <a:round/>
+                      <a:headEnd type="none" w="med" len="med"/>
+                      <a:tailEnd type="none" w="med" len="med"/>
+                    </a:lnR>
+                    <a:lnT w="12700" cap="flat" cmpd="sng" algn="ctr">
+                      <a:solidFill>
+                        <a:srgbClr val="000000"/>
+                      </a:solidFill>
+                      <a:prstDash val="solid"/>
+                      <a:round/>
+                      <a:headEnd type="none" w="med" len="med"/>
+                      <a:tailEnd type="none" w="med" len="med"/>
+                    </a:lnT>
+                    <a:lnB w="12700" cap="flat" cmpd="sng" algn="ctr">
+                      <a:solidFill>
+                        <a:srgbClr val="000000"/>
+                      </a:solidFill>
+                      <a:prstDash val="solid"/>
+                      <a:round/>
+                      <a:headEnd type="none" w="med" len="med"/>
+                      <a:tailEnd type="none" w="med" len="med"/>
+                    </a:lnB>
+                    <a:solidFill>
+                      <a:srgbClr val="FFFFFF"/>
+                    </a:solidFill>
+                  </a:tcPr>
+                </a:tc>
+                <a:tc>
+                  <a:txBody>
+                    <a:bodyPr/>
+                    <a:lstStyle/>
+                    <a:p>
                       <a:pPr indent="0" marL="0">
                         <a:buNone/>
                       </a:pPr>
@@ -4349,6 +4466,74 @@
                     <a:bodyPr/>
                     <a:lstStyle/>
                     <a:p>
+                      <a:pPr algn="l" indent="0" marL="0">
+                        <a:buNone/>
+                      </a:pPr>
+                      <a:r>
+                        <a:rPr lang="en-US" sz="1100" dirty="0">
+                          <a:solidFill>
+                            <a:srgbClr val="000000"/>
+                          </a:solidFill>
+                          <a:latin typeface="Arial" pitchFamily="34" charset="0"/>
+                          <a:ea typeface="Arial" pitchFamily="34" charset="-122"/>
+                          <a:cs typeface="Arial" pitchFamily="34" charset="-120"/>
+                        </a:rPr>
+                        <a:t>X2</a:t>
+                      </a:r>
+                      <a:endParaRPr lang="en-US" sz="1100" dirty="0">
+                        <a:latin typeface="Arial" charset="0"/>
+                        <a:ea typeface="Arial" charset="0"/>
+                        <a:cs typeface="Arial" charset="0"/>
+                      </a:endParaRPr>
+                    </a:p>
+                  </a:txBody>
+                  <a:tcPr marL="91440" marR="91440" marT="45720" marB="45720" anchor="ctr">
+                    <a:lnL w="12700" cap="flat" cmpd="sng" algn="ctr">
+                      <a:solidFill>
+                        <a:srgbClr val="000000"/>
+                      </a:solidFill>
+                      <a:prstDash val="solid"/>
+                      <a:round/>
+                      <a:headEnd type="none" w="med" len="med"/>
+                      <a:tailEnd type="none" w="med" len="med"/>
+                    </a:lnL>
+                    <a:lnR w="12700" cap="flat" cmpd="sng" algn="ctr">
+                      <a:solidFill>
+                        <a:srgbClr val="000000"/>
+                      </a:solidFill>
+                      <a:prstDash val="solid"/>
+                      <a:round/>
+                      <a:headEnd type="none" w="med" len="med"/>
+                      <a:tailEnd type="none" w="med" len="med"/>
+                    </a:lnR>
+                    <a:lnT w="12700" cap="flat" cmpd="sng" algn="ctr">
+                      <a:solidFill>
+                        <a:srgbClr val="000000"/>
+                      </a:solidFill>
+                      <a:prstDash val="solid"/>
+                      <a:round/>
+                      <a:headEnd type="none" w="med" len="med"/>
+                      <a:tailEnd type="none" w="med" len="med"/>
+                    </a:lnT>
+                    <a:lnB w="12700" cap="flat" cmpd="sng" algn="ctr">
+                      <a:solidFill>
+                        <a:srgbClr val="000000"/>
+                      </a:solidFill>
+                      <a:prstDash val="solid"/>
+                      <a:round/>
+                      <a:headEnd type="none" w="med" len="med"/>
+                      <a:tailEnd type="none" w="med" len="med"/>
+                    </a:lnB>
+                    <a:solidFill>
+                      <a:srgbClr val="FFFFFF"/>
+                    </a:solidFill>
+                  </a:tcPr>
+                </a:tc>
+                <a:tc>
+                  <a:txBody>
+                    <a:bodyPr/>
+                    <a:lstStyle/>
+                    <a:p>
                       <a:pPr indent="0" marL="0">
                         <a:buNone/>
                       </a:pPr>
@@ -4555,12 +4740,80 @@
                     <a:bodyPr/>
                     <a:lstStyle/>
                     <a:p>
-                      <a:pPr indent="0" marL="0">
+                      <a:pPr algn="l" indent="0" marL="0">
                         <a:buNone/>
                       </a:pPr>
                       <a:r>
                         <a:rPr lang="en-US" sz="1100" dirty="0">
                           <a:solidFill>
+                            <a:srgbClr val="000000"/>
+                          </a:solidFill>
+                          <a:latin typeface="Arial" pitchFamily="34" charset="0"/>
+                          <a:ea typeface="Arial" pitchFamily="34" charset="-122"/>
+                          <a:cs typeface="Arial" pitchFamily="34" charset="-120"/>
+                        </a:rPr>
+                        <a:t>y</a:t>
+                      </a:r>
+                      <a:endParaRPr lang="en-US" sz="1100" dirty="0">
+                        <a:latin typeface="Arial" charset="0"/>
+                        <a:ea typeface="Arial" charset="0"/>
+                        <a:cs typeface="Arial" charset="0"/>
+                      </a:endParaRPr>
+                    </a:p>
+                  </a:txBody>
+                  <a:tcPr marL="91440" marR="91440" marT="45720" marB="45720" anchor="ctr">
+                    <a:lnL w="12700" cap="flat" cmpd="sng" algn="ctr">
+                      <a:solidFill>
+                        <a:srgbClr val="000000"/>
+                      </a:solidFill>
+                      <a:prstDash val="solid"/>
+                      <a:round/>
+                      <a:headEnd type="none" w="med" len="med"/>
+                      <a:tailEnd type="none" w="med" len="med"/>
+                    </a:lnL>
+                    <a:lnR w="12700" cap="flat" cmpd="sng" algn="ctr">
+                      <a:solidFill>
+                        <a:srgbClr val="000000"/>
+                      </a:solidFill>
+                      <a:prstDash val="solid"/>
+                      <a:round/>
+                      <a:headEnd type="none" w="med" len="med"/>
+                      <a:tailEnd type="none" w="med" len="med"/>
+                    </a:lnR>
+                    <a:lnT w="12700" cap="flat" cmpd="sng" algn="ctr">
+                      <a:solidFill>
+                        <a:srgbClr val="000000"/>
+                      </a:solidFill>
+                      <a:prstDash val="solid"/>
+                      <a:round/>
+                      <a:headEnd type="none" w="med" len="med"/>
+                      <a:tailEnd type="none" w="med" len="med"/>
+                    </a:lnT>
+                    <a:lnB w="12700" cap="flat" cmpd="sng" algn="ctr">
+                      <a:solidFill>
+                        <a:srgbClr val="000000"/>
+                      </a:solidFill>
+                      <a:prstDash val="solid"/>
+                      <a:round/>
+                      <a:headEnd type="none" w="med" len="med"/>
+                      <a:tailEnd type="none" w="med" len="med"/>
+                    </a:lnB>
+                    <a:solidFill>
+                      <a:srgbClr val="FFFFFF"/>
+                    </a:solidFill>
+                  </a:tcPr>
+                </a:tc>
+                <a:tc>
+                  <a:txBody>
+                    <a:bodyPr/>
+                    <a:lstStyle/>
+                    <a:p>
+                      <a:pPr indent="0" marL="0">
+                        <a:buNone/>
+                      </a:pPr>
+                      <a:r>
+                        <a:rPr lang="en-US" sz="1100" dirty="0">
+                          <a:solidFill>
                             <a:srgbClr val="FF0000"/>
                           </a:solidFill>
                           <a:latin typeface="Arial" pitchFamily="34" charset="0"/>
@@ -4614,7 +4867,7 @@
                       <a:tailEnd type="none" w="med" len="med"/>
                     </a:lnB>
                     <a:solidFill>
-                      <a:srgbClr val="FFF7C2"/>
+                      <a:srgbClr val="CCFFE1"/>
                     </a:solidFill>
                   </a:tcPr>
                 </a:tc>
@@ -4682,7 +4935,7 @@
                       <a:tailEnd type="none" w="med" len="med"/>
                     </a:lnB>
                     <a:solidFill>
-                      <a:srgbClr val="FFF7C2"/>
+                      <a:srgbClr val="CCFFE1"/>
                     </a:solidFill>
                   </a:tcPr>
                 </a:tc>
@@ -4750,7 +5003,7 @@
                       <a:tailEnd type="none" w="med" len="med"/>
                     </a:lnB>
                     <a:solidFill>
-                      <a:srgbClr val="FFF7C2"/>
+                      <a:srgbClr val="CCFFE1"/>
                     </a:solidFill>
                   </a:tcPr>
                 </a:tc>
